--- a/assets/pptx/catalog-388.pptx
+++ b/assets/pptx/catalog-388.pptx
@@ -3427,7 +3427,7 @@
                 <a:ea typeface="Ebrima"/>
                 <a:cs typeface="Ebrima"/>
               </a:rPr>
-              <a:t>ድንቅህን ላይ ነው የማታ የማታ (2x)</a:t>
+              <a:t>ድንቅህን ላይ ነው የማታ የማታ 2x</a:t>
             </a:r>
           </a:p>
         </p:txBody>
@@ -3548,7 +3548,7 @@
                 <a:ea typeface="Ebrima"/>
                 <a:cs typeface="Ebrima"/>
               </a:rPr>
-              <a:t>ግን ድሉ የእኔ ነው የማታ የማታ (2x)</a:t>
+              <a:t>ግን ድሉ የእኔ ነው የማታ የማታ 2x</a:t>
             </a:r>
           </a:p>
         </p:txBody>
@@ -3615,7 +3615,7 @@
                 <a:ea typeface="Ebrima"/>
                 <a:cs typeface="Ebrima"/>
               </a:rPr>
-              <a:t>ሰላም ነው (4x)</a:t>
+              <a:t>ሰላም ነው 4x</a:t>
             </a:r>
           </a:p>
           <a:p>
@@ -3633,7 +3633,7 @@
                 <a:ea typeface="Ebrima"/>
                 <a:cs typeface="Ebrima"/>
               </a:rPr>
-              <a:t>ሰላም ነው (4x)</a:t>
+              <a:t>ሰላም ነው 4x</a:t>
             </a:r>
           </a:p>
         </p:txBody>
@@ -4745,7 +4745,7 @@
                 <a:ea typeface="Ebrima"/>
                 <a:cs typeface="Ebrima"/>
               </a:rPr>
-              <a:t>ሰላም ነው (4x)</a:t>
+              <a:t>ሰላም ነው 4x</a:t>
             </a:r>
           </a:p>
           <a:p>
@@ -4763,7 +4763,7 @@
                 <a:ea typeface="Ebrima"/>
                 <a:cs typeface="Ebrima"/>
               </a:rPr>
-              <a:t>ሰላም ነው (4x)</a:t>
+              <a:t>ሰላም ነው 4x</a:t>
             </a:r>
           </a:p>
         </p:txBody>
